--- a/tool/smstokintone/docs/S2k 操作マニュアル.pptx
+++ b/tool/smstokintone/docs/S2k 操作マニュアル.pptx
@@ -6240,10 +6240,10 @@
       </p:grpSpPr>
       <p:pic>
         <p:nvPicPr>
-          <p:cNvPr id="5" name="図 4">
-            <a:extLst>
-              <a:ext uri="{FF2B5EF4-FFF2-40B4-BE49-F238E27FC236}">
-                <a16:creationId xmlns:a16="http://schemas.microsoft.com/office/drawing/2014/main" id="{587F128B-85F6-6916-3E83-8B356B535E27}"/>
+          <p:cNvPr id="6" name="図 5">
+            <a:extLst>
+              <a:ext uri="{FF2B5EF4-FFF2-40B4-BE49-F238E27FC236}">
+                <a16:creationId xmlns:a16="http://schemas.microsoft.com/office/drawing/2014/main" id="{A5E03EE9-17C5-6F74-70E8-B5FCDD3DCF60}"/>
               </a:ext>
             </a:extLst>
           </p:cNvPr>
@@ -6266,8 +6266,8 @@
         </p:blipFill>
         <p:spPr>
           <a:xfrm>
-            <a:off x="6538031" y="1190803"/>
-            <a:ext cx="2457450" cy="4200525"/>
+            <a:off x="4852987" y="1366837"/>
+            <a:ext cx="2486025" cy="4124325"/>
           </a:xfrm>
           <a:prstGeom prst="rect">
             <a:avLst/>
@@ -6312,10 +6312,10 @@
       </p:grpSpPr>
       <p:pic>
         <p:nvPicPr>
-          <p:cNvPr id="5" name="図 4">
-            <a:extLst>
-              <a:ext uri="{FF2B5EF4-FFF2-40B4-BE49-F238E27FC236}">
-                <a16:creationId xmlns:a16="http://schemas.microsoft.com/office/drawing/2014/main" id="{FD9B6637-F8A4-C138-2D96-937CDFCD2E34}"/>
+          <p:cNvPr id="3" name="図 2">
+            <a:extLst>
+              <a:ext uri="{FF2B5EF4-FFF2-40B4-BE49-F238E27FC236}">
+                <a16:creationId xmlns:a16="http://schemas.microsoft.com/office/drawing/2014/main" id="{CF6CEED6-BD9A-ED19-EF34-B3EAC4319B5A}"/>
               </a:ext>
             </a:extLst>
           </p:cNvPr>
@@ -6338,8 +6338,8 @@
         </p:blipFill>
         <p:spPr>
           <a:xfrm>
-            <a:off x="6538031" y="1190803"/>
-            <a:ext cx="2457450" cy="4200525"/>
+            <a:off x="6523743" y="1181453"/>
+            <a:ext cx="2486025" cy="4124325"/>
           </a:xfrm>
           <a:prstGeom prst="rect">
             <a:avLst/>
@@ -6400,10 +6400,10 @@
       </p:sp>
       <p:pic>
         <p:nvPicPr>
-          <p:cNvPr id="6" name="図 5">
-            <a:extLst>
-              <a:ext uri="{FF2B5EF4-FFF2-40B4-BE49-F238E27FC236}">
-                <a16:creationId xmlns:a16="http://schemas.microsoft.com/office/drawing/2014/main" id="{4C8870F2-6ED5-9A7E-E549-E834C62D8172}"/>
+          <p:cNvPr id="4" name="図 3">
+            <a:extLst>
+              <a:ext uri="{FF2B5EF4-FFF2-40B4-BE49-F238E27FC236}">
+                <a16:creationId xmlns:a16="http://schemas.microsoft.com/office/drawing/2014/main" id="{BB11AC29-53D8-E7D0-CB83-E6588F2183F6}"/>
               </a:ext>
             </a:extLst>
           </p:cNvPr>
@@ -6420,8 +6420,8 @@
         </p:blipFill>
         <p:spPr>
           <a:xfrm>
-            <a:off x="2372705" y="1328746"/>
-            <a:ext cx="2456901" cy="4200508"/>
+            <a:off x="1747863" y="1359228"/>
+            <a:ext cx="2487384" cy="4139543"/>
           </a:xfrm>
           <a:prstGeom prst="rect">
             <a:avLst/>
@@ -6466,10 +6466,10 @@
       </p:grpSpPr>
       <p:pic>
         <p:nvPicPr>
-          <p:cNvPr id="3" name="図 2">
-            <a:extLst>
-              <a:ext uri="{FF2B5EF4-FFF2-40B4-BE49-F238E27FC236}">
-                <a16:creationId xmlns:a16="http://schemas.microsoft.com/office/drawing/2014/main" id="{80562874-B0A5-502F-389A-066615AF3365}"/>
+          <p:cNvPr id="6" name="図 5">
+            <a:extLst>
+              <a:ext uri="{FF2B5EF4-FFF2-40B4-BE49-F238E27FC236}">
+                <a16:creationId xmlns:a16="http://schemas.microsoft.com/office/drawing/2014/main" id="{414E8B91-38B2-65E1-E578-69F3C85651FF}"/>
               </a:ext>
             </a:extLst>
           </p:cNvPr>
@@ -6492,8 +6492,8 @@
         </p:blipFill>
         <p:spPr>
           <a:xfrm>
-            <a:off x="6538031" y="1190803"/>
-            <a:ext cx="2457450" cy="4200525"/>
+            <a:off x="6523743" y="1181453"/>
+            <a:ext cx="2486025" cy="4124325"/>
           </a:xfrm>
           <a:prstGeom prst="rect">
             <a:avLst/>
@@ -6554,10 +6554,10 @@
       </p:sp>
       <p:pic>
         <p:nvPicPr>
-          <p:cNvPr id="4" name="図 3">
-            <a:extLst>
-              <a:ext uri="{FF2B5EF4-FFF2-40B4-BE49-F238E27FC236}">
-                <a16:creationId xmlns:a16="http://schemas.microsoft.com/office/drawing/2014/main" id="{A3AB1822-D5AA-AD4C-A1C8-165416C92EAE}"/>
+          <p:cNvPr id="7" name="図 6">
+            <a:extLst>
+              <a:ext uri="{FF2B5EF4-FFF2-40B4-BE49-F238E27FC236}">
+                <a16:creationId xmlns:a16="http://schemas.microsoft.com/office/drawing/2014/main" id="{D52DB119-D545-6FF1-E7FF-1E590A9872F4}"/>
               </a:ext>
             </a:extLst>
           </p:cNvPr>
@@ -6574,8 +6574,8 @@
         </p:blipFill>
         <p:spPr>
           <a:xfrm>
-            <a:off x="3490305" y="1179531"/>
-            <a:ext cx="2456901" cy="4200508"/>
+            <a:off x="1713997" y="1542872"/>
+            <a:ext cx="2487384" cy="4121253"/>
           </a:xfrm>
           <a:prstGeom prst="rect">
             <a:avLst/>
@@ -6686,10 +6686,10 @@
       </p:grpSpPr>
       <p:pic>
         <p:nvPicPr>
-          <p:cNvPr id="7" name="図 6">
-            <a:extLst>
-              <a:ext uri="{FF2B5EF4-FFF2-40B4-BE49-F238E27FC236}">
-                <a16:creationId xmlns:a16="http://schemas.microsoft.com/office/drawing/2014/main" id="{D01A5C5F-8A17-9642-C2BD-D82A2B0AAC81}"/>
+          <p:cNvPr id="5" name="図 4">
+            <a:extLst>
+              <a:ext uri="{FF2B5EF4-FFF2-40B4-BE49-F238E27FC236}">
+                <a16:creationId xmlns:a16="http://schemas.microsoft.com/office/drawing/2014/main" id="{04137656-1E68-CF61-E14B-9AC8D49C327B}"/>
               </a:ext>
             </a:extLst>
           </p:cNvPr>
@@ -6712,8 +6712,8 @@
         </p:blipFill>
         <p:spPr>
           <a:xfrm>
-            <a:off x="6601001" y="404987"/>
-            <a:ext cx="2466975" cy="4191000"/>
+            <a:off x="6634338" y="511175"/>
+            <a:ext cx="2400300" cy="4210050"/>
           </a:xfrm>
           <a:prstGeom prst="rect">
             <a:avLst/>
@@ -6774,10 +6774,10 @@
       </p:sp>
       <p:pic>
         <p:nvPicPr>
-          <p:cNvPr id="9" name="図 8">
-            <a:extLst>
-              <a:ext uri="{FF2B5EF4-FFF2-40B4-BE49-F238E27FC236}">
-                <a16:creationId xmlns:a16="http://schemas.microsoft.com/office/drawing/2014/main" id="{61FC8176-C385-392A-F5EE-A075193E6461}"/>
+          <p:cNvPr id="8" name="図 7">
+            <a:extLst>
+              <a:ext uri="{FF2B5EF4-FFF2-40B4-BE49-F238E27FC236}">
+                <a16:creationId xmlns:a16="http://schemas.microsoft.com/office/drawing/2014/main" id="{69DB934C-EB43-9440-C946-F99FC5DDDC0E}"/>
               </a:ext>
             </a:extLst>
           </p:cNvPr>
@@ -6794,8 +6794,8 @@
         </p:blipFill>
         <p:spPr>
           <a:xfrm>
-            <a:off x="2357039" y="1749483"/>
-            <a:ext cx="2469094" cy="4194412"/>
+            <a:off x="1530896" y="1461164"/>
+            <a:ext cx="2402032" cy="4206605"/>
           </a:xfrm>
           <a:prstGeom prst="rect">
             <a:avLst/>
@@ -6840,10 +6840,10 @@
       </p:grpSpPr>
       <p:pic>
         <p:nvPicPr>
-          <p:cNvPr id="3" name="図 2">
-            <a:extLst>
-              <a:ext uri="{FF2B5EF4-FFF2-40B4-BE49-F238E27FC236}">
-                <a16:creationId xmlns:a16="http://schemas.microsoft.com/office/drawing/2014/main" id="{17EBFE9D-3423-958E-8DE8-D8E6E6D3394B}"/>
+          <p:cNvPr id="8" name="図 7">
+            <a:extLst>
+              <a:ext uri="{FF2B5EF4-FFF2-40B4-BE49-F238E27FC236}">
+                <a16:creationId xmlns:a16="http://schemas.microsoft.com/office/drawing/2014/main" id="{B5A70DDC-4427-6007-5E29-D92645ACFBA3}"/>
               </a:ext>
             </a:extLst>
           </p:cNvPr>
@@ -6866,8 +6866,8 @@
         </p:blipFill>
         <p:spPr>
           <a:xfrm>
-            <a:off x="6538031" y="1190803"/>
-            <a:ext cx="2457450" cy="4200525"/>
+            <a:off x="6523743" y="1181453"/>
+            <a:ext cx="2486025" cy="4124325"/>
           </a:xfrm>
           <a:prstGeom prst="rect">
             <a:avLst/>
@@ -6928,10 +6928,10 @@
       </p:sp>
       <p:pic>
         <p:nvPicPr>
-          <p:cNvPr id="7" name="図 6">
-            <a:extLst>
-              <a:ext uri="{FF2B5EF4-FFF2-40B4-BE49-F238E27FC236}">
-                <a16:creationId xmlns:a16="http://schemas.microsoft.com/office/drawing/2014/main" id="{97403FCC-67D4-6795-FFBD-B0B235FAD57A}"/>
+          <p:cNvPr id="9" name="図 8">
+            <a:extLst>
+              <a:ext uri="{FF2B5EF4-FFF2-40B4-BE49-F238E27FC236}">
+                <a16:creationId xmlns:a16="http://schemas.microsoft.com/office/drawing/2014/main" id="{FA8CC87C-2B65-4289-1BA8-BF9120C47EDB}"/>
               </a:ext>
             </a:extLst>
           </p:cNvPr>
@@ -6948,8 +6948,8 @@
         </p:blipFill>
         <p:spPr>
           <a:xfrm>
-            <a:off x="1526038" y="1190820"/>
-            <a:ext cx="2456901" cy="4200508"/>
+            <a:off x="3170797" y="1368373"/>
+            <a:ext cx="2487384" cy="4121253"/>
           </a:xfrm>
           <a:prstGeom prst="rect">
             <a:avLst/>
@@ -6994,10 +6994,10 @@
       </p:grpSpPr>
       <p:pic>
         <p:nvPicPr>
-          <p:cNvPr id="7" name="図 6">
-            <a:extLst>
-              <a:ext uri="{FF2B5EF4-FFF2-40B4-BE49-F238E27FC236}">
-                <a16:creationId xmlns:a16="http://schemas.microsoft.com/office/drawing/2014/main" id="{38E23968-CA56-87D8-20FD-4A1CF412FD0D}"/>
+          <p:cNvPr id="5" name="図 4">
+            <a:extLst>
+              <a:ext uri="{FF2B5EF4-FFF2-40B4-BE49-F238E27FC236}">
+                <a16:creationId xmlns:a16="http://schemas.microsoft.com/office/drawing/2014/main" id="{A5AC4D56-D6A4-66FA-19C6-503951C3A0A5}"/>
               </a:ext>
             </a:extLst>
           </p:cNvPr>
@@ -7020,8 +7020,8 @@
         </p:blipFill>
         <p:spPr>
           <a:xfrm>
-            <a:off x="4638675" y="2771775"/>
-            <a:ext cx="2914650" cy="1314450"/>
+            <a:off x="5024437" y="2957512"/>
+            <a:ext cx="2143125" cy="942975"/>
           </a:xfrm>
           <a:prstGeom prst="rect">
             <a:avLst/>

--- a/tool/smstokintone/docs/S2k 操作マニュアル.pptx
+++ b/tool/smstokintone/docs/S2k 操作マニュアル.pptx
@@ -5,7 +5,7 @@
     <p:sldMasterId id="2147483648" r:id="rId1"/>
   </p:sldMasterIdLst>
   <p:notesMasterIdLst>
-    <p:notesMasterId r:id="rId66"/>
+    <p:notesMasterId r:id="rId69"/>
   </p:notesMasterIdLst>
   <p:sldIdLst>
     <p:sldId id="256" r:id="rId2"/>
@@ -35,14 +35,14 @@
     <p:sldId id="326" r:id="rId26"/>
     <p:sldId id="276" r:id="rId27"/>
     <p:sldId id="327" r:id="rId28"/>
-    <p:sldId id="278" r:id="rId29"/>
-    <p:sldId id="339" r:id="rId30"/>
-    <p:sldId id="279" r:id="rId31"/>
-    <p:sldId id="338" r:id="rId32"/>
-    <p:sldId id="280" r:id="rId33"/>
-    <p:sldId id="281" r:id="rId34"/>
-    <p:sldId id="282" r:id="rId35"/>
-    <p:sldId id="283" r:id="rId36"/>
+    <p:sldId id="339" r:id="rId29"/>
+    <p:sldId id="279" r:id="rId30"/>
+    <p:sldId id="338" r:id="rId31"/>
+    <p:sldId id="280" r:id="rId32"/>
+    <p:sldId id="281" r:id="rId33"/>
+    <p:sldId id="282" r:id="rId34"/>
+    <p:sldId id="283" r:id="rId35"/>
+    <p:sldId id="355" r:id="rId36"/>
     <p:sldId id="284" r:id="rId37"/>
     <p:sldId id="285" r:id="rId38"/>
     <p:sldId id="286" r:id="rId39"/>
@@ -50,28 +50,31 @@
     <p:sldId id="287" r:id="rId41"/>
     <p:sldId id="335" r:id="rId42"/>
     <p:sldId id="332" r:id="rId43"/>
-    <p:sldId id="290" r:id="rId44"/>
-    <p:sldId id="301" r:id="rId45"/>
-    <p:sldId id="310" r:id="rId46"/>
-    <p:sldId id="305" r:id="rId47"/>
-    <p:sldId id="340" r:id="rId48"/>
-    <p:sldId id="306" r:id="rId49"/>
-    <p:sldId id="354" r:id="rId50"/>
-    <p:sldId id="316" r:id="rId51"/>
-    <p:sldId id="333" r:id="rId52"/>
-    <p:sldId id="341" r:id="rId53"/>
-    <p:sldId id="342" r:id="rId54"/>
-    <p:sldId id="343" r:id="rId55"/>
-    <p:sldId id="344" r:id="rId56"/>
-    <p:sldId id="347" r:id="rId57"/>
-    <p:sldId id="345" r:id="rId58"/>
-    <p:sldId id="346" r:id="rId59"/>
-    <p:sldId id="348" r:id="rId60"/>
-    <p:sldId id="349" r:id="rId61"/>
-    <p:sldId id="350" r:id="rId62"/>
-    <p:sldId id="351" r:id="rId63"/>
-    <p:sldId id="353" r:id="rId64"/>
-    <p:sldId id="352" r:id="rId65"/>
+    <p:sldId id="356" r:id="rId44"/>
+    <p:sldId id="290" r:id="rId45"/>
+    <p:sldId id="301" r:id="rId46"/>
+    <p:sldId id="310" r:id="rId47"/>
+    <p:sldId id="305" r:id="rId48"/>
+    <p:sldId id="340" r:id="rId49"/>
+    <p:sldId id="306" r:id="rId50"/>
+    <p:sldId id="354" r:id="rId51"/>
+    <p:sldId id="316" r:id="rId52"/>
+    <p:sldId id="333" r:id="rId53"/>
+    <p:sldId id="341" r:id="rId54"/>
+    <p:sldId id="342" r:id="rId55"/>
+    <p:sldId id="343" r:id="rId56"/>
+    <p:sldId id="344" r:id="rId57"/>
+    <p:sldId id="357" r:id="rId58"/>
+    <p:sldId id="347" r:id="rId59"/>
+    <p:sldId id="358" r:id="rId60"/>
+    <p:sldId id="345" r:id="rId61"/>
+    <p:sldId id="346" r:id="rId62"/>
+    <p:sldId id="348" r:id="rId63"/>
+    <p:sldId id="349" r:id="rId64"/>
+    <p:sldId id="350" r:id="rId65"/>
+    <p:sldId id="351" r:id="rId66"/>
+    <p:sldId id="353" r:id="rId67"/>
+    <p:sldId id="352" r:id="rId68"/>
   </p:sldIdLst>
   <p:sldSz cx="12192000" cy="6858000"/>
   <p:notesSz cx="6858000" cy="9144000"/>
@@ -5982,10 +5985,10 @@
       </p:grpSpPr>
       <p:pic>
         <p:nvPicPr>
-          <p:cNvPr id="6" name="図 5">
-            <a:extLst>
-              <a:ext uri="{FF2B5EF4-FFF2-40B4-BE49-F238E27FC236}">
-                <a16:creationId xmlns:a16="http://schemas.microsoft.com/office/drawing/2014/main" id="{693E23F9-A23C-1F0D-1760-3A8A7F0B6901}"/>
+          <p:cNvPr id="5" name="図 4">
+            <a:extLst>
+              <a:ext uri="{FF2B5EF4-FFF2-40B4-BE49-F238E27FC236}">
+                <a16:creationId xmlns:a16="http://schemas.microsoft.com/office/drawing/2014/main" id="{83CB0C9B-6237-1D52-EB5D-BAC23DCEDDF3}"/>
               </a:ext>
             </a:extLst>
           </p:cNvPr>
@@ -6008,8 +6011,8 @@
         </p:blipFill>
         <p:spPr>
           <a:xfrm>
-            <a:off x="7487179" y="523875"/>
-            <a:ext cx="2771775" cy="5810250"/>
+            <a:off x="7439012" y="417473"/>
+            <a:ext cx="2773920" cy="6023054"/>
           </a:xfrm>
           <a:prstGeom prst="rect">
             <a:avLst/>
@@ -6082,7 +6085,7 @@
         </p:nvSpPr>
         <p:spPr>
           <a:xfrm>
-            <a:off x="7618709" y="3265313"/>
+            <a:off x="7573553" y="3299180"/>
             <a:ext cx="216000" cy="216000"/>
           </a:xfrm>
           <a:prstGeom prst="rect">
@@ -6134,7 +6137,7 @@
         </p:nvSpPr>
         <p:spPr>
           <a:xfrm>
-            <a:off x="7618709" y="4523972"/>
+            <a:off x="7573553" y="4591706"/>
             <a:ext cx="216000" cy="216000"/>
           </a:xfrm>
           <a:prstGeom prst="rect">
@@ -6174,10 +6177,10 @@
       </p:sp>
       <p:pic>
         <p:nvPicPr>
-          <p:cNvPr id="12" name="図 11">
-            <a:extLst>
-              <a:ext uri="{FF2B5EF4-FFF2-40B4-BE49-F238E27FC236}">
-                <a16:creationId xmlns:a16="http://schemas.microsoft.com/office/drawing/2014/main" id="{C24423E1-BA91-049F-9EE4-1DD9CB7A9257}"/>
+          <p:cNvPr id="7" name="図 6">
+            <a:extLst>
+              <a:ext uri="{FF2B5EF4-FFF2-40B4-BE49-F238E27FC236}">
+                <a16:creationId xmlns:a16="http://schemas.microsoft.com/office/drawing/2014/main" id="{89BEEBA7-C3D6-313E-492C-8C4A0FD15A5E}"/>
               </a:ext>
             </a:extLst>
           </p:cNvPr>
@@ -6194,8 +6197,8 @@
         </p:blipFill>
         <p:spPr>
           <a:xfrm>
-            <a:off x="3139885" y="930404"/>
-            <a:ext cx="2773920" cy="5809992"/>
+            <a:off x="2376254" y="500446"/>
+            <a:ext cx="2773920" cy="6029467"/>
           </a:xfrm>
           <a:prstGeom prst="rect">
             <a:avLst/>
@@ -7126,10 +7129,10 @@
       </p:grpSpPr>
       <p:pic>
         <p:nvPicPr>
-          <p:cNvPr id="5" name="図 4">
-            <a:extLst>
-              <a:ext uri="{FF2B5EF4-FFF2-40B4-BE49-F238E27FC236}">
-                <a16:creationId xmlns:a16="http://schemas.microsoft.com/office/drawing/2014/main" id="{62696256-FF48-16AB-A9EF-F1F690C27919}"/>
+          <p:cNvPr id="3" name="図 2">
+            <a:extLst>
+              <a:ext uri="{FF2B5EF4-FFF2-40B4-BE49-F238E27FC236}">
+                <a16:creationId xmlns:a16="http://schemas.microsoft.com/office/drawing/2014/main" id="{66850EF0-5DD1-C757-AD63-482266782451}"/>
               </a:ext>
             </a:extLst>
           </p:cNvPr>
@@ -7152,8 +7155,8 @@
         </p:blipFill>
         <p:spPr>
           <a:xfrm>
-            <a:off x="4862512" y="833437"/>
-            <a:ext cx="2466975" cy="5191125"/>
+            <a:off x="5086350" y="1238250"/>
+            <a:ext cx="2019300" cy="4381500"/>
           </a:xfrm>
           <a:prstGeom prst="rect">
             <a:avLst/>
@@ -7198,10 +7201,10 @@
       </p:grpSpPr>
       <p:pic>
         <p:nvPicPr>
-          <p:cNvPr id="2" name="図 1">
-            <a:extLst>
-              <a:ext uri="{FF2B5EF4-FFF2-40B4-BE49-F238E27FC236}">
-                <a16:creationId xmlns:a16="http://schemas.microsoft.com/office/drawing/2014/main" id="{770B102C-29BD-25BC-3ED3-C585A7097680}"/>
+          <p:cNvPr id="4" name="図 3">
+            <a:extLst>
+              <a:ext uri="{FF2B5EF4-FFF2-40B4-BE49-F238E27FC236}">
+                <a16:creationId xmlns:a16="http://schemas.microsoft.com/office/drawing/2014/main" id="{F2C71767-5DED-ACC5-4072-BE6F5B36ABDB}"/>
               </a:ext>
             </a:extLst>
           </p:cNvPr>
@@ -7224,8 +7227,8 @@
         </p:blipFill>
         <p:spPr>
           <a:xfrm>
-            <a:off x="7250487" y="968904"/>
-            <a:ext cx="2466975" cy="5191125"/>
+            <a:off x="7295643" y="1001181"/>
+            <a:ext cx="2393868" cy="5194242"/>
           </a:xfrm>
           <a:prstGeom prst="rect">
             <a:avLst/>
@@ -7286,10 +7289,10 @@
       </p:sp>
       <p:pic>
         <p:nvPicPr>
-          <p:cNvPr id="3" name="図 2">
-            <a:extLst>
-              <a:ext uri="{FF2B5EF4-FFF2-40B4-BE49-F238E27FC236}">
-                <a16:creationId xmlns:a16="http://schemas.microsoft.com/office/drawing/2014/main" id="{70D3BAA8-B142-AAF8-D208-AC557D8733F6}"/>
+          <p:cNvPr id="5" name="図 4">
+            <a:extLst>
+              <a:ext uri="{FF2B5EF4-FFF2-40B4-BE49-F238E27FC236}">
+                <a16:creationId xmlns:a16="http://schemas.microsoft.com/office/drawing/2014/main" id="{FA837DC8-EF60-BC7B-6943-141365EFB1E7}"/>
               </a:ext>
             </a:extLst>
           </p:cNvPr>
@@ -7306,8 +7309,8 @@
         </p:blipFill>
         <p:spPr>
           <a:xfrm>
-            <a:off x="3122964" y="685123"/>
-            <a:ext cx="2469094" cy="5194242"/>
+            <a:off x="3185168" y="831879"/>
+            <a:ext cx="2389839" cy="5194242"/>
           </a:xfrm>
           <a:prstGeom prst="rect">
             <a:avLst/>
@@ -7352,10 +7355,10 @@
       </p:grpSpPr>
       <p:pic>
         <p:nvPicPr>
-          <p:cNvPr id="2" name="図 1">
-            <a:extLst>
-              <a:ext uri="{FF2B5EF4-FFF2-40B4-BE49-F238E27FC236}">
-                <a16:creationId xmlns:a16="http://schemas.microsoft.com/office/drawing/2014/main" id="{2B27F307-5E01-1152-2949-903A5A195EF2}"/>
+          <p:cNvPr id="5" name="図 4">
+            <a:extLst>
+              <a:ext uri="{FF2B5EF4-FFF2-40B4-BE49-F238E27FC236}">
+                <a16:creationId xmlns:a16="http://schemas.microsoft.com/office/drawing/2014/main" id="{25CD0509-1031-043D-E904-E629820DF080}"/>
               </a:ext>
             </a:extLst>
           </p:cNvPr>
@@ -7378,8 +7381,8 @@
         </p:blipFill>
         <p:spPr>
           <a:xfrm>
-            <a:off x="7250487" y="968904"/>
-            <a:ext cx="2466975" cy="5191125"/>
+            <a:off x="7284354" y="1001181"/>
+            <a:ext cx="2393868" cy="5194242"/>
           </a:xfrm>
           <a:prstGeom prst="rect">
             <a:avLst/>
@@ -7440,10 +7443,10 @@
       </p:sp>
       <p:pic>
         <p:nvPicPr>
-          <p:cNvPr id="4" name="図 3">
-            <a:extLst>
-              <a:ext uri="{FF2B5EF4-FFF2-40B4-BE49-F238E27FC236}">
-                <a16:creationId xmlns:a16="http://schemas.microsoft.com/office/drawing/2014/main" id="{85C05079-7DA2-2BD2-454F-4B11B1A82B3E}"/>
+          <p:cNvPr id="6" name="図 5">
+            <a:extLst>
+              <a:ext uri="{FF2B5EF4-FFF2-40B4-BE49-F238E27FC236}">
+                <a16:creationId xmlns:a16="http://schemas.microsoft.com/office/drawing/2014/main" id="{BCC3EE89-9738-6ED7-6B8F-9736A02E552E}"/>
               </a:ext>
             </a:extLst>
           </p:cNvPr>
@@ -7460,8 +7463,8 @@
         </p:blipFill>
         <p:spPr>
           <a:xfrm>
-            <a:off x="2739142" y="1022526"/>
-            <a:ext cx="2469094" cy="5194242"/>
+            <a:off x="4060980" y="831879"/>
+            <a:ext cx="2395936" cy="5194242"/>
           </a:xfrm>
           <a:prstGeom prst="rect">
             <a:avLst/>
@@ -7506,10 +7509,10 @@
       </p:grpSpPr>
       <p:pic>
         <p:nvPicPr>
-          <p:cNvPr id="3" name="図 2">
-            <a:extLst>
-              <a:ext uri="{FF2B5EF4-FFF2-40B4-BE49-F238E27FC236}">
-                <a16:creationId xmlns:a16="http://schemas.microsoft.com/office/drawing/2014/main" id="{7C366ABA-E253-FCC4-A064-0604700A6781}"/>
+          <p:cNvPr id="2" name="図 1">
+            <a:extLst>
+              <a:ext uri="{FF2B5EF4-FFF2-40B4-BE49-F238E27FC236}">
+                <a16:creationId xmlns:a16="http://schemas.microsoft.com/office/drawing/2014/main" id="{663964A6-3B31-C6BE-EC24-79FA512A3737}"/>
               </a:ext>
             </a:extLst>
           </p:cNvPr>
@@ -7532,8 +7535,8 @@
         </p:blipFill>
         <p:spPr>
           <a:xfrm>
-            <a:off x="7250487" y="968904"/>
-            <a:ext cx="2466975" cy="5191125"/>
+            <a:off x="7295643" y="1001181"/>
+            <a:ext cx="2393868" cy="5194242"/>
           </a:xfrm>
           <a:prstGeom prst="rect">
             <a:avLst/>
@@ -7594,10 +7597,10 @@
       </p:sp>
       <p:pic>
         <p:nvPicPr>
-          <p:cNvPr id="9" name="図 8">
-            <a:extLst>
-              <a:ext uri="{FF2B5EF4-FFF2-40B4-BE49-F238E27FC236}">
-                <a16:creationId xmlns:a16="http://schemas.microsoft.com/office/drawing/2014/main" id="{663BCF32-08E6-956C-2234-EFE93350C82C}"/>
+          <p:cNvPr id="4" name="図 3">
+            <a:extLst>
+              <a:ext uri="{FF2B5EF4-FFF2-40B4-BE49-F238E27FC236}">
+                <a16:creationId xmlns:a16="http://schemas.microsoft.com/office/drawing/2014/main" id="{55D2BDA3-DC63-3B26-E807-41F5A32CEE4C}"/>
               </a:ext>
             </a:extLst>
           </p:cNvPr>
@@ -7614,8 +7617,8 @@
         </p:blipFill>
         <p:spPr>
           <a:xfrm>
-            <a:off x="1102253" y="606101"/>
-            <a:ext cx="2469094" cy="5194242"/>
+            <a:off x="2971462" y="1001181"/>
+            <a:ext cx="2389839" cy="5194242"/>
           </a:xfrm>
           <a:prstGeom prst="rect">
             <a:avLst/>
@@ -7636,102 +7639,6 @@
 </file>
 
 <file path=ppt/slides/slide28.xml><?xml version="1.0" encoding="utf-8"?>
-<p:sld xmlns:a="http://schemas.openxmlformats.org/drawingml/2006/main" xmlns:r="http://schemas.openxmlformats.org/officeDocument/2006/relationships" xmlns:p="http://schemas.openxmlformats.org/presentationml/2006/main">
-  <p:cSld>
-    <p:spTree>
-      <p:nvGrpSpPr>
-        <p:cNvPr id="1" name=""/>
-        <p:cNvGrpSpPr/>
-        <p:nvPr/>
-      </p:nvGrpSpPr>
-      <p:grpSpPr>
-        <a:xfrm>
-          <a:off x="0" y="0"/>
-          <a:ext cx="0" cy="0"/>
-          <a:chOff x="0" y="0"/>
-          <a:chExt cx="0" cy="0"/>
-        </a:xfrm>
-      </p:grpSpPr>
-      <p:pic>
-        <p:nvPicPr>
-          <p:cNvPr id="4" name="図 3">
-            <a:extLst>
-              <a:ext uri="{FF2B5EF4-FFF2-40B4-BE49-F238E27FC236}">
-                <a16:creationId xmlns:a16="http://schemas.microsoft.com/office/drawing/2014/main" id="{FBF7BA4D-1C8B-C1A0-FF4B-4258B844236F}"/>
-              </a:ext>
-            </a:extLst>
-          </p:cNvPr>
-          <p:cNvPicPr>
-            <a:picLocks noChangeAspect="1"/>
-          </p:cNvPicPr>
-          <p:nvPr/>
-        </p:nvPicPr>
-        <p:blipFill>
-          <a:blip r:embed="rId2">
-            <a:extLst>
-              <a:ext uri="{28A0092B-C50C-407E-A947-70E740481C1C}">
-                <a14:useLocalDpi xmlns:a14="http://schemas.microsoft.com/office/drawing/2010/main" val="0"/>
-              </a:ext>
-            </a:extLst>
-          </a:blip>
-          <a:stretch>
-            <a:fillRect/>
-          </a:stretch>
-        </p:blipFill>
-        <p:spPr>
-          <a:xfrm>
-            <a:off x="4773083" y="1474611"/>
-            <a:ext cx="2627541" cy="2837745"/>
-          </a:xfrm>
-          <a:prstGeom prst="rect">
-            <a:avLst/>
-          </a:prstGeom>
-        </p:spPr>
-      </p:pic>
-      <p:pic>
-        <p:nvPicPr>
-          <p:cNvPr id="6" name="図 5">
-            <a:extLst>
-              <a:ext uri="{FF2B5EF4-FFF2-40B4-BE49-F238E27FC236}">
-                <a16:creationId xmlns:a16="http://schemas.microsoft.com/office/drawing/2014/main" id="{C94D569C-ED7E-3105-BFE9-BF9BAE90F0F4}"/>
-              </a:ext>
-            </a:extLst>
-          </p:cNvPr>
-          <p:cNvPicPr>
-            <a:picLocks noChangeAspect="1"/>
-          </p:cNvPicPr>
-          <p:nvPr/>
-        </p:nvPicPr>
-        <p:blipFill>
-          <a:blip r:embed="rId3"/>
-          <a:stretch>
-            <a:fillRect/>
-          </a:stretch>
-        </p:blipFill>
-        <p:spPr>
-          <a:xfrm>
-            <a:off x="1971264" y="1477470"/>
-            <a:ext cx="2627604" cy="2834886"/>
-          </a:xfrm>
-          <a:prstGeom prst="rect">
-            <a:avLst/>
-          </a:prstGeom>
-        </p:spPr>
-      </p:pic>
-    </p:spTree>
-    <p:extLst>
-      <p:ext uri="{BB962C8B-B14F-4D97-AF65-F5344CB8AC3E}">
-        <p14:creationId xmlns:p14="http://schemas.microsoft.com/office/powerpoint/2010/main" val="837235834"/>
-      </p:ext>
-    </p:extLst>
-  </p:cSld>
-  <p:clrMapOvr>
-    <a:masterClrMapping/>
-  </p:clrMapOvr>
-</p:sld>
-</file>
-
-<file path=ppt/slides/slide29.xml><?xml version="1.0" encoding="utf-8"?>
 <p:sld xmlns:a="http://schemas.openxmlformats.org/drawingml/2006/main" xmlns:r="http://schemas.openxmlformats.org/officeDocument/2006/relationships" xmlns:p="http://schemas.openxmlformats.org/presentationml/2006/main">
   <p:cSld>
     <p:spTree>
@@ -7782,7 +7689,7 @@
         </p:blipFill>
         <p:spPr>
           <a:xfrm>
-            <a:off x="5186362" y="2266950"/>
+            <a:off x="5175073" y="2278239"/>
             <a:ext cx="1819275" cy="2324100"/>
           </a:xfrm>
           <a:prstGeom prst="rect">
@@ -7794,6 +7701,72 @@
     <p:extLst>
       <p:ext uri="{BB962C8B-B14F-4D97-AF65-F5344CB8AC3E}">
         <p14:creationId xmlns:p14="http://schemas.microsoft.com/office/powerpoint/2010/main" val="163225719"/>
+      </p:ext>
+    </p:extLst>
+  </p:cSld>
+  <p:clrMapOvr>
+    <a:masterClrMapping/>
+  </p:clrMapOvr>
+</p:sld>
+</file>
+
+<file path=ppt/slides/slide29.xml><?xml version="1.0" encoding="utf-8"?>
+<p:sld xmlns:a="http://schemas.openxmlformats.org/drawingml/2006/main" xmlns:r="http://schemas.openxmlformats.org/officeDocument/2006/relationships" xmlns:p="http://schemas.openxmlformats.org/presentationml/2006/main">
+  <p:cSld>
+    <p:spTree>
+      <p:nvGrpSpPr>
+        <p:cNvPr id="1" name=""/>
+        <p:cNvGrpSpPr/>
+        <p:nvPr/>
+      </p:nvGrpSpPr>
+      <p:grpSpPr>
+        <a:xfrm>
+          <a:off x="0" y="0"/>
+          <a:ext cx="0" cy="0"/>
+          <a:chOff x="0" y="0"/>
+          <a:chExt cx="0" cy="0"/>
+        </a:xfrm>
+      </p:grpSpPr>
+      <p:pic>
+        <p:nvPicPr>
+          <p:cNvPr id="7" name="図 6">
+            <a:extLst>
+              <a:ext uri="{FF2B5EF4-FFF2-40B4-BE49-F238E27FC236}">
+                <a16:creationId xmlns:a16="http://schemas.microsoft.com/office/drawing/2014/main" id="{F368330C-DFC1-F7E0-03D6-25EFC15365A6}"/>
+              </a:ext>
+            </a:extLst>
+          </p:cNvPr>
+          <p:cNvPicPr>
+            <a:picLocks noChangeAspect="1"/>
+          </p:cNvPicPr>
+          <p:nvPr/>
+        </p:nvPicPr>
+        <p:blipFill>
+          <a:blip r:embed="rId2">
+            <a:extLst>
+              <a:ext uri="{28A0092B-C50C-407E-A947-70E740481C1C}">
+                <a14:useLocalDpi xmlns:a14="http://schemas.microsoft.com/office/drawing/2010/main" val="0"/>
+              </a:ext>
+            </a:extLst>
+          </a:blip>
+          <a:stretch>
+            <a:fillRect/>
+          </a:stretch>
+        </p:blipFill>
+        <p:spPr>
+          <a:xfrm>
+            <a:off x="5172075" y="1343025"/>
+            <a:ext cx="1847850" cy="4171950"/>
+          </a:xfrm>
+          <a:prstGeom prst="rect">
+            <a:avLst/>
+          </a:prstGeom>
+        </p:spPr>
+      </p:pic>
+    </p:spTree>
+    <p:extLst>
+      <p:ext uri="{BB962C8B-B14F-4D97-AF65-F5344CB8AC3E}">
+        <p14:creationId xmlns:p14="http://schemas.microsoft.com/office/powerpoint/2010/main" val="3879279029"/>
       </p:ext>
     </p:extLst>
   </p:cSld>
@@ -7956,72 +7929,6 @@
   <p:cSld>
     <p:spTree>
       <p:nvGrpSpPr>
-        <p:cNvPr id="1" name=""/>
-        <p:cNvGrpSpPr/>
-        <p:nvPr/>
-      </p:nvGrpSpPr>
-      <p:grpSpPr>
-        <a:xfrm>
-          <a:off x="0" y="0"/>
-          <a:ext cx="0" cy="0"/>
-          <a:chOff x="0" y="0"/>
-          <a:chExt cx="0" cy="0"/>
-        </a:xfrm>
-      </p:grpSpPr>
-      <p:pic>
-        <p:nvPicPr>
-          <p:cNvPr id="7" name="図 6">
-            <a:extLst>
-              <a:ext uri="{FF2B5EF4-FFF2-40B4-BE49-F238E27FC236}">
-                <a16:creationId xmlns:a16="http://schemas.microsoft.com/office/drawing/2014/main" id="{F368330C-DFC1-F7E0-03D6-25EFC15365A6}"/>
-              </a:ext>
-            </a:extLst>
-          </p:cNvPr>
-          <p:cNvPicPr>
-            <a:picLocks noChangeAspect="1"/>
-          </p:cNvPicPr>
-          <p:nvPr/>
-        </p:nvPicPr>
-        <p:blipFill>
-          <a:blip r:embed="rId2">
-            <a:extLst>
-              <a:ext uri="{28A0092B-C50C-407E-A947-70E740481C1C}">
-                <a14:useLocalDpi xmlns:a14="http://schemas.microsoft.com/office/drawing/2010/main" val="0"/>
-              </a:ext>
-            </a:extLst>
-          </a:blip>
-          <a:stretch>
-            <a:fillRect/>
-          </a:stretch>
-        </p:blipFill>
-        <p:spPr>
-          <a:xfrm>
-            <a:off x="5172075" y="1343025"/>
-            <a:ext cx="1847850" cy="4171950"/>
-          </a:xfrm>
-          <a:prstGeom prst="rect">
-            <a:avLst/>
-          </a:prstGeom>
-        </p:spPr>
-      </p:pic>
-    </p:spTree>
-    <p:extLst>
-      <p:ext uri="{BB962C8B-B14F-4D97-AF65-F5344CB8AC3E}">
-        <p14:creationId xmlns:p14="http://schemas.microsoft.com/office/powerpoint/2010/main" val="3879279029"/>
-      </p:ext>
-    </p:extLst>
-  </p:cSld>
-  <p:clrMapOvr>
-    <a:masterClrMapping/>
-  </p:clrMapOvr>
-</p:sld>
-</file>
-
-<file path=ppt/slides/slide31.xml><?xml version="1.0" encoding="utf-8"?>
-<p:sld xmlns:a="http://schemas.openxmlformats.org/drawingml/2006/main" xmlns:r="http://schemas.openxmlformats.org/officeDocument/2006/relationships" xmlns:p="http://schemas.openxmlformats.org/presentationml/2006/main">
-  <p:cSld>
-    <p:spTree>
-      <p:nvGrpSpPr>
         <p:cNvPr id="1" name="">
           <a:extLst>
             <a:ext uri="{FF2B5EF4-FFF2-40B4-BE49-F238E27FC236}">
@@ -8089,7 +7996,7 @@
 </p:sld>
 </file>
 
-<file path=ppt/slides/slide32.xml><?xml version="1.0" encoding="utf-8"?>
+<file path=ppt/slides/slide31.xml><?xml version="1.0" encoding="utf-8"?>
 <p:sld xmlns:a="http://schemas.openxmlformats.org/drawingml/2006/main" xmlns:r="http://schemas.openxmlformats.org/officeDocument/2006/relationships" xmlns:p="http://schemas.openxmlformats.org/presentationml/2006/main">
   <p:cSld>
     <p:spTree>
@@ -8119,7 +8026,7 @@
 </p:sld>
 </file>
 
-<file path=ppt/slides/slide33.xml><?xml version="1.0" encoding="utf-8"?>
+<file path=ppt/slides/slide32.xml><?xml version="1.0" encoding="utf-8"?>
 <p:sld xmlns:a="http://schemas.openxmlformats.org/drawingml/2006/main" xmlns:r="http://schemas.openxmlformats.org/officeDocument/2006/relationships" xmlns:p="http://schemas.openxmlformats.org/presentationml/2006/main">
   <p:cSld>
     <p:spTree>
@@ -8273,7 +8180,7 @@
 </p:sld>
 </file>
 
-<file path=ppt/slides/slide34.xml><?xml version="1.0" encoding="utf-8"?>
+<file path=ppt/slides/slide33.xml><?xml version="1.0" encoding="utf-8"?>
 <p:sld xmlns:a="http://schemas.openxmlformats.org/drawingml/2006/main" xmlns:r="http://schemas.openxmlformats.org/officeDocument/2006/relationships" xmlns:p="http://schemas.openxmlformats.org/presentationml/2006/main">
   <p:cSld>
     <p:spTree>
@@ -8339,7 +8246,7 @@
 </p:sld>
 </file>
 
-<file path=ppt/slides/slide35.xml><?xml version="1.0" encoding="utf-8"?>
+<file path=ppt/slides/slide34.xml><?xml version="1.0" encoding="utf-8"?>
 <p:sld xmlns:a="http://schemas.openxmlformats.org/drawingml/2006/main" xmlns:r="http://schemas.openxmlformats.org/officeDocument/2006/relationships" xmlns:p="http://schemas.openxmlformats.org/presentationml/2006/main">
   <p:cSld>
     <p:spTree>
@@ -8402,6 +8309,78 @@
     <p:extLst>
       <p:ext uri="{BB962C8B-B14F-4D97-AF65-F5344CB8AC3E}">
         <p14:creationId xmlns:p14="http://schemas.microsoft.com/office/powerpoint/2010/main" val="2634932908"/>
+      </p:ext>
+    </p:extLst>
+  </p:cSld>
+  <p:clrMapOvr>
+    <a:masterClrMapping/>
+  </p:clrMapOvr>
+</p:sld>
+</file>
+
+<file path=ppt/slides/slide35.xml><?xml version="1.0" encoding="utf-8"?>
+<p:sld xmlns:a="http://schemas.openxmlformats.org/drawingml/2006/main" xmlns:r="http://schemas.openxmlformats.org/officeDocument/2006/relationships" xmlns:p="http://schemas.openxmlformats.org/presentationml/2006/main">
+  <p:cSld>
+    <p:spTree>
+      <p:nvGrpSpPr>
+        <p:cNvPr id="1" name="">
+          <a:extLst>
+            <a:ext uri="{FF2B5EF4-FFF2-40B4-BE49-F238E27FC236}">
+              <a16:creationId xmlns:a16="http://schemas.microsoft.com/office/drawing/2014/main" id="{C94852D6-D2E6-1CBD-A7B2-64D8DDA42703}"/>
+            </a:ext>
+          </a:extLst>
+        </p:cNvPr>
+        <p:cNvGrpSpPr/>
+        <p:nvPr/>
+      </p:nvGrpSpPr>
+      <p:grpSpPr>
+        <a:xfrm>
+          <a:off x="0" y="0"/>
+          <a:ext cx="0" cy="0"/>
+          <a:chOff x="0" y="0"/>
+          <a:chExt cx="0" cy="0"/>
+        </a:xfrm>
+      </p:grpSpPr>
+      <p:pic>
+        <p:nvPicPr>
+          <p:cNvPr id="6" name="図 5">
+            <a:extLst>
+              <a:ext uri="{FF2B5EF4-FFF2-40B4-BE49-F238E27FC236}">
+                <a16:creationId xmlns:a16="http://schemas.microsoft.com/office/drawing/2014/main" id="{64CAA400-13D2-19BF-4156-8E501D3002DA}"/>
+              </a:ext>
+            </a:extLst>
+          </p:cNvPr>
+          <p:cNvPicPr>
+            <a:picLocks noChangeAspect="1"/>
+          </p:cNvPicPr>
+          <p:nvPr/>
+        </p:nvPicPr>
+        <p:blipFill>
+          <a:blip r:embed="rId2">
+            <a:extLst>
+              <a:ext uri="{28A0092B-C50C-407E-A947-70E740481C1C}">
+                <a14:useLocalDpi xmlns:a14="http://schemas.microsoft.com/office/drawing/2010/main" val="0"/>
+              </a:ext>
+            </a:extLst>
+          </a:blip>
+          <a:stretch>
+            <a:fillRect/>
+          </a:stretch>
+        </p:blipFill>
+        <p:spPr>
+          <a:xfrm>
+            <a:off x="5005387" y="2709862"/>
+            <a:ext cx="2181225" cy="1438275"/>
+          </a:xfrm>
+          <a:prstGeom prst="rect">
+            <a:avLst/>
+          </a:prstGeom>
+        </p:spPr>
+      </p:pic>
+    </p:spTree>
+    <p:extLst>
+      <p:ext uri="{BB962C8B-B14F-4D97-AF65-F5344CB8AC3E}">
+        <p14:creationId xmlns:p14="http://schemas.microsoft.com/office/powerpoint/2010/main" val="1577944956"/>
       </p:ext>
     </p:extLst>
   </p:cSld>
@@ -8924,10 +8903,10 @@
       </p:grpSpPr>
       <p:pic>
         <p:nvPicPr>
-          <p:cNvPr id="9" name="図 8">
-            <a:extLst>
-              <a:ext uri="{FF2B5EF4-FFF2-40B4-BE49-F238E27FC236}">
-                <a16:creationId xmlns:a16="http://schemas.microsoft.com/office/drawing/2014/main" id="{A0C7D3B5-EF28-2A85-7C93-0EEBAF58C144}"/>
+          <p:cNvPr id="5" name="図 4">
+            <a:extLst>
+              <a:ext uri="{FF2B5EF4-FFF2-40B4-BE49-F238E27FC236}">
+                <a16:creationId xmlns:a16="http://schemas.microsoft.com/office/drawing/2014/main" id="{6ECE9B0D-EF81-F48D-CE61-AEF75B843C9E}"/>
               </a:ext>
             </a:extLst>
           </p:cNvPr>
@@ -8950,8 +8929,8 @@
         </p:blipFill>
         <p:spPr>
           <a:xfrm>
-            <a:off x="4867275" y="1628775"/>
-            <a:ext cx="2457450" cy="3600450"/>
+            <a:off x="7143573" y="1676400"/>
+            <a:ext cx="2352675" cy="3552825"/>
           </a:xfrm>
           <a:prstGeom prst="rect">
             <a:avLst/>
@@ -8996,10 +8975,10 @@
       </p:grpSpPr>
       <p:pic>
         <p:nvPicPr>
-          <p:cNvPr id="4" name="図 3">
-            <a:extLst>
-              <a:ext uri="{FF2B5EF4-FFF2-40B4-BE49-F238E27FC236}">
-                <a16:creationId xmlns:a16="http://schemas.microsoft.com/office/drawing/2014/main" id="{20F43577-EBE0-1CDC-09F2-4EF51E0322AA}"/>
+          <p:cNvPr id="2" name="図 1">
+            <a:extLst>
+              <a:ext uri="{FF2B5EF4-FFF2-40B4-BE49-F238E27FC236}">
+                <a16:creationId xmlns:a16="http://schemas.microsoft.com/office/drawing/2014/main" id="{0D3B1588-9C5F-43CC-9329-4F77FEE14155}"/>
               </a:ext>
             </a:extLst>
           </p:cNvPr>
@@ -9022,8 +9001,8 @@
         </p:blipFill>
         <p:spPr>
           <a:xfrm>
-            <a:off x="7700364" y="1219037"/>
-            <a:ext cx="2457450" cy="3600450"/>
+            <a:off x="7775329" y="1281289"/>
+            <a:ext cx="2352675" cy="3552825"/>
           </a:xfrm>
           <a:prstGeom prst="rect">
             <a:avLst/>
@@ -9084,10 +9063,10 @@
       </p:sp>
       <p:pic>
         <p:nvPicPr>
-          <p:cNvPr id="7" name="図 6">
-            <a:extLst>
-              <a:ext uri="{FF2B5EF4-FFF2-40B4-BE49-F238E27FC236}">
-                <a16:creationId xmlns:a16="http://schemas.microsoft.com/office/drawing/2014/main" id="{EA8D12E1-C617-E42E-BAB2-B36242984D01}"/>
+          <p:cNvPr id="3" name="図 2">
+            <a:extLst>
+              <a:ext uri="{FF2B5EF4-FFF2-40B4-BE49-F238E27FC236}">
+                <a16:creationId xmlns:a16="http://schemas.microsoft.com/office/drawing/2014/main" id="{BD2381C4-0B12-E0A5-0445-5038D7841E6C}"/>
               </a:ext>
             </a:extLst>
           </p:cNvPr>
@@ -9104,8 +9083,8 @@
         </p:blipFill>
         <p:spPr>
           <a:xfrm>
-            <a:off x="2372705" y="2293520"/>
-            <a:ext cx="2456901" cy="3603048"/>
+            <a:off x="3429236" y="2295329"/>
+            <a:ext cx="2353260" cy="3554276"/>
           </a:xfrm>
           <a:prstGeom prst="rect">
             <a:avLst/>
@@ -9202,6 +9181,78 @@
   <p:cSld>
     <p:spTree>
       <p:nvGrpSpPr>
+        <p:cNvPr id="1" name="">
+          <a:extLst>
+            <a:ext uri="{FF2B5EF4-FFF2-40B4-BE49-F238E27FC236}">
+              <a16:creationId xmlns:a16="http://schemas.microsoft.com/office/drawing/2014/main" id="{E5F8D1C4-7F26-33D7-B881-ED19F822C522}"/>
+            </a:ext>
+          </a:extLst>
+        </p:cNvPr>
+        <p:cNvGrpSpPr/>
+        <p:nvPr/>
+      </p:nvGrpSpPr>
+      <p:grpSpPr>
+        <a:xfrm>
+          <a:off x="0" y="0"/>
+          <a:ext cx="0" cy="0"/>
+          <a:chOff x="0" y="0"/>
+          <a:chExt cx="0" cy="0"/>
+        </a:xfrm>
+      </p:grpSpPr>
+      <p:pic>
+        <p:nvPicPr>
+          <p:cNvPr id="3" name="図 2">
+            <a:extLst>
+              <a:ext uri="{FF2B5EF4-FFF2-40B4-BE49-F238E27FC236}">
+                <a16:creationId xmlns:a16="http://schemas.microsoft.com/office/drawing/2014/main" id="{BB83478D-C86A-73DB-44EE-73E5B035E32F}"/>
+              </a:ext>
+            </a:extLst>
+          </p:cNvPr>
+          <p:cNvPicPr>
+            <a:picLocks noChangeAspect="1"/>
+          </p:cNvPicPr>
+          <p:nvPr/>
+        </p:nvPicPr>
+        <p:blipFill>
+          <a:blip r:embed="rId2">
+            <a:extLst>
+              <a:ext uri="{28A0092B-C50C-407E-A947-70E740481C1C}">
+                <a14:useLocalDpi xmlns:a14="http://schemas.microsoft.com/office/drawing/2010/main" val="0"/>
+              </a:ext>
+            </a:extLst>
+          </a:blip>
+          <a:stretch>
+            <a:fillRect/>
+          </a:stretch>
+        </p:blipFill>
+        <p:spPr>
+          <a:xfrm>
+            <a:off x="5224462" y="2614612"/>
+            <a:ext cx="1743075" cy="1628775"/>
+          </a:xfrm>
+          <a:prstGeom prst="rect">
+            <a:avLst/>
+          </a:prstGeom>
+        </p:spPr>
+      </p:pic>
+    </p:spTree>
+    <p:extLst>
+      <p:ext uri="{BB962C8B-B14F-4D97-AF65-F5344CB8AC3E}">
+        <p14:creationId xmlns:p14="http://schemas.microsoft.com/office/powerpoint/2010/main" val="516040095"/>
+      </p:ext>
+    </p:extLst>
+  </p:cSld>
+  <p:clrMapOvr>
+    <a:masterClrMapping/>
+  </p:clrMapOvr>
+</p:sld>
+</file>
+
+<file path=ppt/slides/slide44.xml><?xml version="1.0" encoding="utf-8"?>
+<p:sld xmlns:a="http://schemas.openxmlformats.org/drawingml/2006/main" xmlns:r="http://schemas.openxmlformats.org/officeDocument/2006/relationships" xmlns:p="http://schemas.openxmlformats.org/presentationml/2006/main">
+  <p:cSld>
+    <p:spTree>
+      <p:nvGrpSpPr>
         <p:cNvPr id="1" name=""/>
         <p:cNvGrpSpPr/>
         <p:nvPr/>
@@ -9216,10 +9267,10 @@
       </p:grpSpPr>
       <p:pic>
         <p:nvPicPr>
-          <p:cNvPr id="8" name="図 7">
-            <a:extLst>
-              <a:ext uri="{FF2B5EF4-FFF2-40B4-BE49-F238E27FC236}">
-                <a16:creationId xmlns:a16="http://schemas.microsoft.com/office/drawing/2014/main" id="{F69EC7D1-4C49-B196-DAD0-33204B1EDA77}"/>
+          <p:cNvPr id="5" name="図 4">
+            <a:extLst>
+              <a:ext uri="{FF2B5EF4-FFF2-40B4-BE49-F238E27FC236}">
+                <a16:creationId xmlns:a16="http://schemas.microsoft.com/office/drawing/2014/main" id="{8F634BBF-9949-D077-A348-529E6DC3B6EC}"/>
               </a:ext>
             </a:extLst>
           </p:cNvPr>
@@ -9242,8 +9293,8 @@
         </p:blipFill>
         <p:spPr>
           <a:xfrm>
-            <a:off x="5057775" y="2962275"/>
-            <a:ext cx="2076450" cy="933450"/>
+            <a:off x="5048250" y="3684763"/>
+            <a:ext cx="2095500" cy="933450"/>
           </a:xfrm>
           <a:prstGeom prst="rect">
             <a:avLst/>
@@ -9263,7 +9314,7 @@
 </p:sld>
 </file>
 
-<file path=ppt/slides/slide44.xml><?xml version="1.0" encoding="utf-8"?>
+<file path=ppt/slides/slide45.xml><?xml version="1.0" encoding="utf-8"?>
 <p:sld xmlns:a="http://schemas.openxmlformats.org/drawingml/2006/main" xmlns:r="http://schemas.openxmlformats.org/officeDocument/2006/relationships" xmlns:p="http://schemas.openxmlformats.org/presentationml/2006/main">
   <p:cSld>
     <p:spTree>
@@ -9335,7 +9386,7 @@
 </p:sld>
 </file>
 
-<file path=ppt/slides/slide45.xml><?xml version="1.0" encoding="utf-8"?>
+<file path=ppt/slides/slide46.xml><?xml version="1.0" encoding="utf-8"?>
 <p:sld xmlns:a="http://schemas.openxmlformats.org/drawingml/2006/main" xmlns:r="http://schemas.openxmlformats.org/officeDocument/2006/relationships" xmlns:p="http://schemas.openxmlformats.org/presentationml/2006/main">
   <p:cSld>
     <p:spTree>
@@ -9407,7 +9458,7 @@
 </p:sld>
 </file>
 
-<file path=ppt/slides/slide46.xml><?xml version="1.0" encoding="utf-8"?>
+<file path=ppt/slides/slide47.xml><?xml version="1.0" encoding="utf-8"?>
 <p:sld xmlns:a="http://schemas.openxmlformats.org/drawingml/2006/main" xmlns:r="http://schemas.openxmlformats.org/officeDocument/2006/relationships" xmlns:p="http://schemas.openxmlformats.org/presentationml/2006/main">
   <p:cSld>
     <p:spTree>
@@ -9479,7 +9530,7 @@
 </p:sld>
 </file>
 
-<file path=ppt/slides/slide47.xml><?xml version="1.0" encoding="utf-8"?>
+<file path=ppt/slides/slide48.xml><?xml version="1.0" encoding="utf-8"?>
 <p:sld xmlns:a="http://schemas.openxmlformats.org/drawingml/2006/main" xmlns:r="http://schemas.openxmlformats.org/officeDocument/2006/relationships" xmlns:p="http://schemas.openxmlformats.org/presentationml/2006/main">
   <p:cSld>
     <p:spTree>
@@ -9551,7 +9602,7 @@
 </p:sld>
 </file>
 
-<file path=ppt/slides/slide48.xml><?xml version="1.0" encoding="utf-8"?>
+<file path=ppt/slides/slide49.xml><?xml version="1.0" encoding="utf-8"?>
 <p:sld xmlns:a="http://schemas.openxmlformats.org/drawingml/2006/main" xmlns:r="http://schemas.openxmlformats.org/officeDocument/2006/relationships" xmlns:p="http://schemas.openxmlformats.org/presentationml/2006/main">
   <p:cSld>
     <p:spTree>
@@ -9614,78 +9665,6 @@
     <p:extLst>
       <p:ext uri="{BB962C8B-B14F-4D97-AF65-F5344CB8AC3E}">
         <p14:creationId xmlns:p14="http://schemas.microsoft.com/office/powerpoint/2010/main" val="1534655566"/>
-      </p:ext>
-    </p:extLst>
-  </p:cSld>
-  <p:clrMapOvr>
-    <a:masterClrMapping/>
-  </p:clrMapOvr>
-</p:sld>
-</file>
-
-<file path=ppt/slides/slide49.xml><?xml version="1.0" encoding="utf-8"?>
-<p:sld xmlns:a="http://schemas.openxmlformats.org/drawingml/2006/main" xmlns:r="http://schemas.openxmlformats.org/officeDocument/2006/relationships" xmlns:p="http://schemas.openxmlformats.org/presentationml/2006/main">
-  <p:cSld>
-    <p:spTree>
-      <p:nvGrpSpPr>
-        <p:cNvPr id="1" name="">
-          <a:extLst>
-            <a:ext uri="{FF2B5EF4-FFF2-40B4-BE49-F238E27FC236}">
-              <a16:creationId xmlns:a16="http://schemas.microsoft.com/office/drawing/2014/main" id="{D63F5283-41E3-BDE2-FE26-DB765D29D501}"/>
-            </a:ext>
-          </a:extLst>
-        </p:cNvPr>
-        <p:cNvGrpSpPr/>
-        <p:nvPr/>
-      </p:nvGrpSpPr>
-      <p:grpSpPr>
-        <a:xfrm>
-          <a:off x="0" y="0"/>
-          <a:ext cx="0" cy="0"/>
-          <a:chOff x="0" y="0"/>
-          <a:chExt cx="0" cy="0"/>
-        </a:xfrm>
-      </p:grpSpPr>
-      <p:pic>
-        <p:nvPicPr>
-          <p:cNvPr id="12" name="図 11">
-            <a:extLst>
-              <a:ext uri="{FF2B5EF4-FFF2-40B4-BE49-F238E27FC236}">
-                <a16:creationId xmlns:a16="http://schemas.microsoft.com/office/drawing/2014/main" id="{C4E88AA8-3E0A-5244-233C-BDE661471B5B}"/>
-              </a:ext>
-            </a:extLst>
-          </p:cNvPr>
-          <p:cNvPicPr>
-            <a:picLocks noChangeAspect="1"/>
-          </p:cNvPicPr>
-          <p:nvPr/>
-        </p:nvPicPr>
-        <p:blipFill>
-          <a:blip r:embed="rId2">
-            <a:extLst>
-              <a:ext uri="{28A0092B-C50C-407E-A947-70E740481C1C}">
-                <a14:useLocalDpi xmlns:a14="http://schemas.microsoft.com/office/drawing/2010/main" val="0"/>
-              </a:ext>
-            </a:extLst>
-          </a:blip>
-          <a:stretch>
-            <a:fillRect/>
-          </a:stretch>
-        </p:blipFill>
-        <p:spPr>
-          <a:xfrm>
-            <a:off x="5038725" y="1833562"/>
-            <a:ext cx="2114550" cy="3190875"/>
-          </a:xfrm>
-          <a:prstGeom prst="rect">
-            <a:avLst/>
-          </a:prstGeom>
-        </p:spPr>
-      </p:pic>
-    </p:spTree>
-    <p:extLst>
-      <p:ext uri="{BB962C8B-B14F-4D97-AF65-F5344CB8AC3E}">
-        <p14:creationId xmlns:p14="http://schemas.microsoft.com/office/powerpoint/2010/main" val="2186462547"/>
       </p:ext>
     </p:extLst>
   </p:cSld>
@@ -9799,6 +9778,78 @@
         <p:cNvPr id="1" name="">
           <a:extLst>
             <a:ext uri="{FF2B5EF4-FFF2-40B4-BE49-F238E27FC236}">
+              <a16:creationId xmlns:a16="http://schemas.microsoft.com/office/drawing/2014/main" id="{D63F5283-41E3-BDE2-FE26-DB765D29D501}"/>
+            </a:ext>
+          </a:extLst>
+        </p:cNvPr>
+        <p:cNvGrpSpPr/>
+        <p:nvPr/>
+      </p:nvGrpSpPr>
+      <p:grpSpPr>
+        <a:xfrm>
+          <a:off x="0" y="0"/>
+          <a:ext cx="0" cy="0"/>
+          <a:chOff x="0" y="0"/>
+          <a:chExt cx="0" cy="0"/>
+        </a:xfrm>
+      </p:grpSpPr>
+      <p:pic>
+        <p:nvPicPr>
+          <p:cNvPr id="12" name="図 11">
+            <a:extLst>
+              <a:ext uri="{FF2B5EF4-FFF2-40B4-BE49-F238E27FC236}">
+                <a16:creationId xmlns:a16="http://schemas.microsoft.com/office/drawing/2014/main" id="{C4E88AA8-3E0A-5244-233C-BDE661471B5B}"/>
+              </a:ext>
+            </a:extLst>
+          </p:cNvPr>
+          <p:cNvPicPr>
+            <a:picLocks noChangeAspect="1"/>
+          </p:cNvPicPr>
+          <p:nvPr/>
+        </p:nvPicPr>
+        <p:blipFill>
+          <a:blip r:embed="rId2">
+            <a:extLst>
+              <a:ext uri="{28A0092B-C50C-407E-A947-70E740481C1C}">
+                <a14:useLocalDpi xmlns:a14="http://schemas.microsoft.com/office/drawing/2010/main" val="0"/>
+              </a:ext>
+            </a:extLst>
+          </a:blip>
+          <a:stretch>
+            <a:fillRect/>
+          </a:stretch>
+        </p:blipFill>
+        <p:spPr>
+          <a:xfrm>
+            <a:off x="5038725" y="1833562"/>
+            <a:ext cx="2114550" cy="3190875"/>
+          </a:xfrm>
+          <a:prstGeom prst="rect">
+            <a:avLst/>
+          </a:prstGeom>
+        </p:spPr>
+      </p:pic>
+    </p:spTree>
+    <p:extLst>
+      <p:ext uri="{BB962C8B-B14F-4D97-AF65-F5344CB8AC3E}">
+        <p14:creationId xmlns:p14="http://schemas.microsoft.com/office/powerpoint/2010/main" val="2186462547"/>
+      </p:ext>
+    </p:extLst>
+  </p:cSld>
+  <p:clrMapOvr>
+    <a:masterClrMapping/>
+  </p:clrMapOvr>
+</p:sld>
+</file>
+
+<file path=ppt/slides/slide51.xml><?xml version="1.0" encoding="utf-8"?>
+<p:sld xmlns:a="http://schemas.openxmlformats.org/drawingml/2006/main" xmlns:r="http://schemas.openxmlformats.org/officeDocument/2006/relationships" xmlns:p="http://schemas.openxmlformats.org/presentationml/2006/main">
+  <p:cSld>
+    <p:spTree>
+      <p:nvGrpSpPr>
+        <p:cNvPr id="1" name="">
+          <a:extLst>
+            <a:ext uri="{FF2B5EF4-FFF2-40B4-BE49-F238E27FC236}">
               <a16:creationId xmlns:a16="http://schemas.microsoft.com/office/drawing/2014/main" id="{3FBFFC4B-D084-C9B9-3AB8-9679A22FA9E7}"/>
             </a:ext>
           </a:extLst>
@@ -9863,7 +9914,7 @@
 </p:sld>
 </file>
 
-<file path=ppt/slides/slide51.xml><?xml version="1.0" encoding="utf-8"?>
+<file path=ppt/slides/slide52.xml><?xml version="1.0" encoding="utf-8"?>
 <p:sld xmlns:a="http://schemas.openxmlformats.org/drawingml/2006/main" xmlns:r="http://schemas.openxmlformats.org/officeDocument/2006/relationships" xmlns:p="http://schemas.openxmlformats.org/presentationml/2006/main">
   <p:cSld>
     <p:spTree>
@@ -9899,7 +9950,7 @@
 </p:sld>
 </file>
 
-<file path=ppt/slides/slide52.xml><?xml version="1.0" encoding="utf-8"?>
+<file path=ppt/slides/slide53.xml><?xml version="1.0" encoding="utf-8"?>
 <p:sld xmlns:a="http://schemas.openxmlformats.org/drawingml/2006/main" xmlns:r="http://schemas.openxmlformats.org/officeDocument/2006/relationships" xmlns:p="http://schemas.openxmlformats.org/presentationml/2006/main">
   <p:cSld>
     <p:spTree>
@@ -9971,7 +10022,7 @@
 </p:sld>
 </file>
 
-<file path=ppt/slides/slide53.xml><?xml version="1.0" encoding="utf-8"?>
+<file path=ppt/slides/slide54.xml><?xml version="1.0" encoding="utf-8"?>
 <p:sld xmlns:a="http://schemas.openxmlformats.org/drawingml/2006/main" xmlns:r="http://schemas.openxmlformats.org/officeDocument/2006/relationships" xmlns:p="http://schemas.openxmlformats.org/presentationml/2006/main">
   <p:cSld>
     <p:spTree>
@@ -10125,7 +10176,7 @@
 </p:sld>
 </file>
 
-<file path=ppt/slides/slide54.xml><?xml version="1.0" encoding="utf-8"?>
+<file path=ppt/slides/slide55.xml><?xml version="1.0" encoding="utf-8"?>
 <p:sld xmlns:a="http://schemas.openxmlformats.org/drawingml/2006/main" xmlns:r="http://schemas.openxmlformats.org/officeDocument/2006/relationships" xmlns:p="http://schemas.openxmlformats.org/presentationml/2006/main">
   <p:cSld>
     <p:spTree>
@@ -10279,7 +10330,7 @@
 </p:sld>
 </file>
 
-<file path=ppt/slides/slide55.xml><?xml version="1.0" encoding="utf-8"?>
+<file path=ppt/slides/slide56.xml><?xml version="1.0" encoding="utf-8"?>
 <p:sld xmlns:a="http://schemas.openxmlformats.org/drawingml/2006/main" xmlns:r="http://schemas.openxmlformats.org/officeDocument/2006/relationships" xmlns:p="http://schemas.openxmlformats.org/presentationml/2006/main">
   <p:cSld>
     <p:spTree>
@@ -10433,7 +10484,161 @@
 </p:sld>
 </file>
 
-<file path=ppt/slides/slide56.xml><?xml version="1.0" encoding="utf-8"?>
+<file path=ppt/slides/slide57.xml><?xml version="1.0" encoding="utf-8"?>
+<p:sld xmlns:a="http://schemas.openxmlformats.org/drawingml/2006/main" xmlns:r="http://schemas.openxmlformats.org/officeDocument/2006/relationships" xmlns:p="http://schemas.openxmlformats.org/presentationml/2006/main">
+  <p:cSld>
+    <p:spTree>
+      <p:nvGrpSpPr>
+        <p:cNvPr id="1" name="">
+          <a:extLst>
+            <a:ext uri="{FF2B5EF4-FFF2-40B4-BE49-F238E27FC236}">
+              <a16:creationId xmlns:a16="http://schemas.microsoft.com/office/drawing/2014/main" id="{9694012C-495C-9CEA-7A2C-792703437019}"/>
+            </a:ext>
+          </a:extLst>
+        </p:cNvPr>
+        <p:cNvGrpSpPr/>
+        <p:nvPr/>
+      </p:nvGrpSpPr>
+      <p:grpSpPr>
+        <a:xfrm>
+          <a:off x="0" y="0"/>
+          <a:ext cx="0" cy="0"/>
+          <a:chOff x="0" y="0"/>
+          <a:chExt cx="0" cy="0"/>
+        </a:xfrm>
+      </p:grpSpPr>
+      <p:pic>
+        <p:nvPicPr>
+          <p:cNvPr id="3" name="図 2">
+            <a:extLst>
+              <a:ext uri="{FF2B5EF4-FFF2-40B4-BE49-F238E27FC236}">
+                <a16:creationId xmlns:a16="http://schemas.microsoft.com/office/drawing/2014/main" id="{22D03007-6F4A-66FE-82AE-11E0D13A8490}"/>
+              </a:ext>
+            </a:extLst>
+          </p:cNvPr>
+          <p:cNvPicPr>
+            <a:picLocks noChangeAspect="1"/>
+          </p:cNvPicPr>
+          <p:nvPr/>
+        </p:nvPicPr>
+        <p:blipFill>
+          <a:blip r:embed="rId2">
+            <a:extLst>
+              <a:ext uri="{28A0092B-C50C-407E-A947-70E740481C1C}">
+                <a14:useLocalDpi xmlns:a14="http://schemas.microsoft.com/office/drawing/2010/main" val="0"/>
+              </a:ext>
+            </a:extLst>
+          </a:blip>
+          <a:stretch>
+            <a:fillRect/>
+          </a:stretch>
+        </p:blipFill>
+        <p:spPr>
+          <a:xfrm>
+            <a:off x="4886325" y="1766887"/>
+            <a:ext cx="2419350" cy="3324225"/>
+          </a:xfrm>
+          <a:prstGeom prst="rect">
+            <a:avLst/>
+          </a:prstGeom>
+        </p:spPr>
+      </p:pic>
+      <p:sp>
+        <p:nvSpPr>
+          <p:cNvPr id="4" name="正方形/長方形 3">
+            <a:extLst>
+              <a:ext uri="{FF2B5EF4-FFF2-40B4-BE49-F238E27FC236}">
+                <a16:creationId xmlns:a16="http://schemas.microsoft.com/office/drawing/2014/main" id="{DF169B25-DEE2-FB3A-DF79-A81767100C4A}"/>
+              </a:ext>
+            </a:extLst>
+          </p:cNvPr>
+          <p:cNvSpPr/>
+          <p:nvPr/>
+        </p:nvSpPr>
+        <p:spPr>
+          <a:xfrm flipV="1">
+            <a:off x="4935655" y="3228622"/>
+            <a:ext cx="2320688" cy="1738489"/>
+          </a:xfrm>
+          <a:prstGeom prst="rect">
+            <a:avLst/>
+          </a:prstGeom>
+          <a:noFill/>
+          <a:ln w="28575">
+            <a:solidFill>
+              <a:srgbClr val="FF0000"/>
+            </a:solidFill>
+          </a:ln>
+        </p:spPr>
+        <p:style>
+          <a:lnRef idx="2">
+            <a:schemeClr val="accent1">
+              <a:shade val="15000"/>
+            </a:schemeClr>
+          </a:lnRef>
+          <a:fillRef idx="1">
+            <a:schemeClr val="accent1"/>
+          </a:fillRef>
+          <a:effectRef idx="0">
+            <a:schemeClr val="accent1"/>
+          </a:effectRef>
+          <a:fontRef idx="minor">
+            <a:schemeClr val="lt1"/>
+          </a:fontRef>
+        </p:style>
+        <p:txBody>
+          <a:bodyPr rtlCol="0" anchor="ctr"/>
+          <a:lstStyle/>
+          <a:p>
+            <a:pPr algn="ctr"/>
+            <a:endParaRPr kumimoji="1" lang="ja-JP" altLang="en-US"/>
+          </a:p>
+        </p:txBody>
+      </p:sp>
+      <p:pic>
+        <p:nvPicPr>
+          <p:cNvPr id="5" name="図 4">
+            <a:extLst>
+              <a:ext uri="{FF2B5EF4-FFF2-40B4-BE49-F238E27FC236}">
+                <a16:creationId xmlns:a16="http://schemas.microsoft.com/office/drawing/2014/main" id="{B62E35A2-D0B2-6AB4-334C-3DF24517B5EF}"/>
+              </a:ext>
+            </a:extLst>
+          </p:cNvPr>
+          <p:cNvPicPr>
+            <a:picLocks noChangeAspect="1"/>
+          </p:cNvPicPr>
+          <p:nvPr/>
+        </p:nvPicPr>
+        <p:blipFill>
+          <a:blip r:embed="rId3"/>
+          <a:stretch>
+            <a:fillRect/>
+          </a:stretch>
+        </p:blipFill>
+        <p:spPr>
+          <a:xfrm>
+            <a:off x="740220" y="1965252"/>
+            <a:ext cx="2414225" cy="3322608"/>
+          </a:xfrm>
+          <a:prstGeom prst="rect">
+            <a:avLst/>
+          </a:prstGeom>
+        </p:spPr>
+      </p:pic>
+    </p:spTree>
+    <p:extLst>
+      <p:ext uri="{BB962C8B-B14F-4D97-AF65-F5344CB8AC3E}">
+        <p14:creationId xmlns:p14="http://schemas.microsoft.com/office/powerpoint/2010/main" val="331104355"/>
+      </p:ext>
+    </p:extLst>
+  </p:cSld>
+  <p:clrMapOvr>
+    <a:masterClrMapping/>
+  </p:clrMapOvr>
+</p:sld>
+</file>
+
+<file path=ppt/slides/slide58.xml><?xml version="1.0" encoding="utf-8"?>
 <p:sld xmlns:a="http://schemas.openxmlformats.org/drawingml/2006/main" xmlns:r="http://schemas.openxmlformats.org/officeDocument/2006/relationships" xmlns:p="http://schemas.openxmlformats.org/presentationml/2006/main">
   <p:cSld>
     <p:spTree>
@@ -10587,7 +10792,279 @@
 </p:sld>
 </file>
 
-<file path=ppt/slides/slide57.xml><?xml version="1.0" encoding="utf-8"?>
+<file path=ppt/slides/slide59.xml><?xml version="1.0" encoding="utf-8"?>
+<p:sld xmlns:a="http://schemas.openxmlformats.org/drawingml/2006/main" xmlns:r="http://schemas.openxmlformats.org/officeDocument/2006/relationships" xmlns:p="http://schemas.openxmlformats.org/presentationml/2006/main">
+  <p:cSld>
+    <p:spTree>
+      <p:nvGrpSpPr>
+        <p:cNvPr id="1" name="">
+          <a:extLst>
+            <a:ext uri="{FF2B5EF4-FFF2-40B4-BE49-F238E27FC236}">
+              <a16:creationId xmlns:a16="http://schemas.microsoft.com/office/drawing/2014/main" id="{E49AC7E6-F0FB-E556-3234-44C1A38F0A0B}"/>
+            </a:ext>
+          </a:extLst>
+        </p:cNvPr>
+        <p:cNvGrpSpPr/>
+        <p:nvPr/>
+      </p:nvGrpSpPr>
+      <p:grpSpPr>
+        <a:xfrm>
+          <a:off x="0" y="0"/>
+          <a:ext cx="0" cy="0"/>
+          <a:chOff x="0" y="0"/>
+          <a:chExt cx="0" cy="0"/>
+        </a:xfrm>
+      </p:grpSpPr>
+      <p:pic>
+        <p:nvPicPr>
+          <p:cNvPr id="3" name="図 2">
+            <a:extLst>
+              <a:ext uri="{FF2B5EF4-FFF2-40B4-BE49-F238E27FC236}">
+                <a16:creationId xmlns:a16="http://schemas.microsoft.com/office/drawing/2014/main" id="{391DAAA3-D9A4-9296-685B-D515713CE026}"/>
+              </a:ext>
+            </a:extLst>
+          </p:cNvPr>
+          <p:cNvPicPr>
+            <a:picLocks noChangeAspect="1"/>
+          </p:cNvPicPr>
+          <p:nvPr/>
+        </p:nvPicPr>
+        <p:blipFill>
+          <a:blip r:embed="rId2">
+            <a:extLst>
+              <a:ext uri="{28A0092B-C50C-407E-A947-70E740481C1C}">
+                <a14:useLocalDpi xmlns:a14="http://schemas.microsoft.com/office/drawing/2010/main" val="0"/>
+              </a:ext>
+            </a:extLst>
+          </a:blip>
+          <a:stretch>
+            <a:fillRect/>
+          </a:stretch>
+        </p:blipFill>
+        <p:spPr>
+          <a:xfrm>
+            <a:off x="4886325" y="1766887"/>
+            <a:ext cx="2419350" cy="3324225"/>
+          </a:xfrm>
+          <a:prstGeom prst="rect">
+            <a:avLst/>
+          </a:prstGeom>
+        </p:spPr>
+      </p:pic>
+      <p:sp>
+        <p:nvSpPr>
+          <p:cNvPr id="2" name="正方形/長方形 1">
+            <a:extLst>
+              <a:ext uri="{FF2B5EF4-FFF2-40B4-BE49-F238E27FC236}">
+                <a16:creationId xmlns:a16="http://schemas.microsoft.com/office/drawing/2014/main" id="{120D60F8-99A0-B996-22CE-69270BA643F0}"/>
+              </a:ext>
+            </a:extLst>
+          </p:cNvPr>
+          <p:cNvSpPr/>
+          <p:nvPr/>
+        </p:nvSpPr>
+        <p:spPr>
+          <a:xfrm flipV="1">
+            <a:off x="5249333" y="3872086"/>
+            <a:ext cx="1783645" cy="519291"/>
+          </a:xfrm>
+          <a:prstGeom prst="rect">
+            <a:avLst/>
+          </a:prstGeom>
+          <a:noFill/>
+          <a:ln w="28575">
+            <a:solidFill>
+              <a:srgbClr val="FF0000"/>
+            </a:solidFill>
+          </a:ln>
+        </p:spPr>
+        <p:style>
+          <a:lnRef idx="2">
+            <a:schemeClr val="accent1">
+              <a:shade val="15000"/>
+            </a:schemeClr>
+          </a:lnRef>
+          <a:fillRef idx="1">
+            <a:schemeClr val="accent1"/>
+          </a:fillRef>
+          <a:effectRef idx="0">
+            <a:schemeClr val="accent1"/>
+          </a:effectRef>
+          <a:fontRef idx="minor">
+            <a:schemeClr val="lt1"/>
+          </a:fontRef>
+        </p:style>
+        <p:txBody>
+          <a:bodyPr rtlCol="0" anchor="ctr"/>
+          <a:lstStyle/>
+          <a:p>
+            <a:pPr algn="ctr"/>
+            <a:endParaRPr kumimoji="1" lang="ja-JP" altLang="en-US"/>
+          </a:p>
+        </p:txBody>
+      </p:sp>
+      <p:pic>
+        <p:nvPicPr>
+          <p:cNvPr id="6" name="図 5">
+            <a:extLst>
+              <a:ext uri="{FF2B5EF4-FFF2-40B4-BE49-F238E27FC236}">
+                <a16:creationId xmlns:a16="http://schemas.microsoft.com/office/drawing/2014/main" id="{AC044CC1-6586-D6F4-D269-6EB79D49B261}"/>
+              </a:ext>
+            </a:extLst>
+          </p:cNvPr>
+          <p:cNvPicPr>
+            <a:picLocks noChangeAspect="1"/>
+          </p:cNvPicPr>
+          <p:nvPr/>
+        </p:nvPicPr>
+        <p:blipFill>
+          <a:blip r:embed="rId3"/>
+          <a:stretch>
+            <a:fillRect/>
+          </a:stretch>
+        </p:blipFill>
+        <p:spPr>
+          <a:xfrm>
+            <a:off x="898265" y="2233360"/>
+            <a:ext cx="2414225" cy="3322608"/>
+          </a:xfrm>
+          <a:prstGeom prst="rect">
+            <a:avLst/>
+          </a:prstGeom>
+        </p:spPr>
+      </p:pic>
+    </p:spTree>
+    <p:extLst>
+      <p:ext uri="{BB962C8B-B14F-4D97-AF65-F5344CB8AC3E}">
+        <p14:creationId xmlns:p14="http://schemas.microsoft.com/office/powerpoint/2010/main" val="2927478195"/>
+      </p:ext>
+    </p:extLst>
+  </p:cSld>
+  <p:clrMapOvr>
+    <a:masterClrMapping/>
+  </p:clrMapOvr>
+</p:sld>
+</file>
+
+<file path=ppt/slides/slide6.xml><?xml version="1.0" encoding="utf-8"?>
+<p:sld xmlns:a="http://schemas.openxmlformats.org/drawingml/2006/main" xmlns:r="http://schemas.openxmlformats.org/officeDocument/2006/relationships" xmlns:p="http://schemas.openxmlformats.org/presentationml/2006/main">
+  <p:cSld>
+    <p:spTree>
+      <p:nvGrpSpPr>
+        <p:cNvPr id="1" name=""/>
+        <p:cNvGrpSpPr/>
+        <p:nvPr/>
+      </p:nvGrpSpPr>
+      <p:grpSpPr>
+        <a:xfrm>
+          <a:off x="0" y="0"/>
+          <a:ext cx="0" cy="0"/>
+          <a:chOff x="0" y="0"/>
+          <a:chExt cx="0" cy="0"/>
+        </a:xfrm>
+      </p:grpSpPr>
+      <p:sp>
+        <p:nvSpPr>
+          <p:cNvPr id="8" name="正方形/長方形 7">
+            <a:extLst>
+              <a:ext uri="{FF2B5EF4-FFF2-40B4-BE49-F238E27FC236}">
+                <a16:creationId xmlns:a16="http://schemas.microsoft.com/office/drawing/2014/main" id="{27A5B397-DA30-10A9-3372-621A2BDC21DE}"/>
+              </a:ext>
+            </a:extLst>
+          </p:cNvPr>
+          <p:cNvSpPr/>
+          <p:nvPr/>
+        </p:nvSpPr>
+        <p:spPr>
+          <a:xfrm>
+            <a:off x="8467157" y="1187443"/>
+            <a:ext cx="855133" cy="367955"/>
+          </a:xfrm>
+          <a:prstGeom prst="rect">
+            <a:avLst/>
+          </a:prstGeom>
+          <a:noFill/>
+          <a:ln w="28575">
+            <a:solidFill>
+              <a:srgbClr val="FF0000"/>
+            </a:solidFill>
+          </a:ln>
+        </p:spPr>
+        <p:style>
+          <a:lnRef idx="2">
+            <a:schemeClr val="accent1">
+              <a:shade val="15000"/>
+            </a:schemeClr>
+          </a:lnRef>
+          <a:fillRef idx="1">
+            <a:schemeClr val="accent1"/>
+          </a:fillRef>
+          <a:effectRef idx="0">
+            <a:schemeClr val="accent1"/>
+          </a:effectRef>
+          <a:fontRef idx="minor">
+            <a:schemeClr val="lt1"/>
+          </a:fontRef>
+        </p:style>
+        <p:txBody>
+          <a:bodyPr rtlCol="0" anchor="ctr"/>
+          <a:lstStyle/>
+          <a:p>
+            <a:pPr algn="ctr"/>
+            <a:endParaRPr kumimoji="1" lang="ja-JP" altLang="en-US"/>
+          </a:p>
+        </p:txBody>
+      </p:sp>
+      <p:pic>
+        <p:nvPicPr>
+          <p:cNvPr id="13" name="図 12">
+            <a:extLst>
+              <a:ext uri="{FF2B5EF4-FFF2-40B4-BE49-F238E27FC236}">
+                <a16:creationId xmlns:a16="http://schemas.microsoft.com/office/drawing/2014/main" id="{F928D926-25D0-CF3F-9C41-6200D139B5AF}"/>
+              </a:ext>
+            </a:extLst>
+          </p:cNvPr>
+          <p:cNvPicPr>
+            <a:picLocks noChangeAspect="1"/>
+          </p:cNvPicPr>
+          <p:nvPr/>
+        </p:nvPicPr>
+        <p:blipFill>
+          <a:blip r:embed="rId2">
+            <a:extLst>
+              <a:ext uri="{28A0092B-C50C-407E-A947-70E740481C1C}">
+                <a14:useLocalDpi xmlns:a14="http://schemas.microsoft.com/office/drawing/2010/main" val="0"/>
+              </a:ext>
+            </a:extLst>
+          </a:blip>
+          <a:stretch>
+            <a:fillRect/>
+          </a:stretch>
+        </p:blipFill>
+        <p:spPr>
+          <a:xfrm>
+            <a:off x="4867275" y="2828925"/>
+            <a:ext cx="2457450" cy="1200150"/>
+          </a:xfrm>
+          <a:prstGeom prst="rect">
+            <a:avLst/>
+          </a:prstGeom>
+        </p:spPr>
+      </p:pic>
+    </p:spTree>
+    <p:extLst>
+      <p:ext uri="{BB962C8B-B14F-4D97-AF65-F5344CB8AC3E}">
+        <p14:creationId xmlns:p14="http://schemas.microsoft.com/office/powerpoint/2010/main" val="3076449738"/>
+      </p:ext>
+    </p:extLst>
+  </p:cSld>
+  <p:clrMapOvr>
+    <a:masterClrMapping/>
+  </p:clrMapOvr>
+</p:sld>
+</file>
+
+<file path=ppt/slides/slide60.xml><?xml version="1.0" encoding="utf-8"?>
 <p:sld xmlns:a="http://schemas.openxmlformats.org/drawingml/2006/main" xmlns:r="http://schemas.openxmlformats.org/officeDocument/2006/relationships" xmlns:p="http://schemas.openxmlformats.org/presentationml/2006/main">
   <p:cSld>
     <p:spTree>
@@ -10741,7 +11218,7 @@
 </p:sld>
 </file>
 
-<file path=ppt/slides/slide58.xml><?xml version="1.0" encoding="utf-8"?>
+<file path=ppt/slides/slide61.xml><?xml version="1.0" encoding="utf-8"?>
 <p:sld xmlns:a="http://schemas.openxmlformats.org/drawingml/2006/main" xmlns:r="http://schemas.openxmlformats.org/officeDocument/2006/relationships" xmlns:p="http://schemas.openxmlformats.org/presentationml/2006/main">
   <p:cSld>
     <p:spTree>
@@ -10895,7 +11372,7 @@
 </p:sld>
 </file>
 
-<file path=ppt/slides/slide59.xml><?xml version="1.0" encoding="utf-8"?>
+<file path=ppt/slides/slide62.xml><?xml version="1.0" encoding="utf-8"?>
 <p:sld xmlns:a="http://schemas.openxmlformats.org/drawingml/2006/main" xmlns:r="http://schemas.openxmlformats.org/officeDocument/2006/relationships" xmlns:p="http://schemas.openxmlformats.org/presentationml/2006/main">
   <p:cSld>
     <p:spTree>
@@ -10931,125 +11408,7 @@
 </p:sld>
 </file>
 
-<file path=ppt/slides/slide6.xml><?xml version="1.0" encoding="utf-8"?>
-<p:sld xmlns:a="http://schemas.openxmlformats.org/drawingml/2006/main" xmlns:r="http://schemas.openxmlformats.org/officeDocument/2006/relationships" xmlns:p="http://schemas.openxmlformats.org/presentationml/2006/main">
-  <p:cSld>
-    <p:spTree>
-      <p:nvGrpSpPr>
-        <p:cNvPr id="1" name=""/>
-        <p:cNvGrpSpPr/>
-        <p:nvPr/>
-      </p:nvGrpSpPr>
-      <p:grpSpPr>
-        <a:xfrm>
-          <a:off x="0" y="0"/>
-          <a:ext cx="0" cy="0"/>
-          <a:chOff x="0" y="0"/>
-          <a:chExt cx="0" cy="0"/>
-        </a:xfrm>
-      </p:grpSpPr>
-      <p:sp>
-        <p:nvSpPr>
-          <p:cNvPr id="8" name="正方形/長方形 7">
-            <a:extLst>
-              <a:ext uri="{FF2B5EF4-FFF2-40B4-BE49-F238E27FC236}">
-                <a16:creationId xmlns:a16="http://schemas.microsoft.com/office/drawing/2014/main" id="{27A5B397-DA30-10A9-3372-621A2BDC21DE}"/>
-              </a:ext>
-            </a:extLst>
-          </p:cNvPr>
-          <p:cNvSpPr/>
-          <p:nvPr/>
-        </p:nvSpPr>
-        <p:spPr>
-          <a:xfrm>
-            <a:off x="8467157" y="1187443"/>
-            <a:ext cx="855133" cy="367955"/>
-          </a:xfrm>
-          <a:prstGeom prst="rect">
-            <a:avLst/>
-          </a:prstGeom>
-          <a:noFill/>
-          <a:ln w="28575">
-            <a:solidFill>
-              <a:srgbClr val="FF0000"/>
-            </a:solidFill>
-          </a:ln>
-        </p:spPr>
-        <p:style>
-          <a:lnRef idx="2">
-            <a:schemeClr val="accent1">
-              <a:shade val="15000"/>
-            </a:schemeClr>
-          </a:lnRef>
-          <a:fillRef idx="1">
-            <a:schemeClr val="accent1"/>
-          </a:fillRef>
-          <a:effectRef idx="0">
-            <a:schemeClr val="accent1"/>
-          </a:effectRef>
-          <a:fontRef idx="minor">
-            <a:schemeClr val="lt1"/>
-          </a:fontRef>
-        </p:style>
-        <p:txBody>
-          <a:bodyPr rtlCol="0" anchor="ctr"/>
-          <a:lstStyle/>
-          <a:p>
-            <a:pPr algn="ctr"/>
-            <a:endParaRPr kumimoji="1" lang="ja-JP" altLang="en-US"/>
-          </a:p>
-        </p:txBody>
-      </p:sp>
-      <p:pic>
-        <p:nvPicPr>
-          <p:cNvPr id="13" name="図 12">
-            <a:extLst>
-              <a:ext uri="{FF2B5EF4-FFF2-40B4-BE49-F238E27FC236}">
-                <a16:creationId xmlns:a16="http://schemas.microsoft.com/office/drawing/2014/main" id="{F928D926-25D0-CF3F-9C41-6200D139B5AF}"/>
-              </a:ext>
-            </a:extLst>
-          </p:cNvPr>
-          <p:cNvPicPr>
-            <a:picLocks noChangeAspect="1"/>
-          </p:cNvPicPr>
-          <p:nvPr/>
-        </p:nvPicPr>
-        <p:blipFill>
-          <a:blip r:embed="rId2">
-            <a:extLst>
-              <a:ext uri="{28A0092B-C50C-407E-A947-70E740481C1C}">
-                <a14:useLocalDpi xmlns:a14="http://schemas.microsoft.com/office/drawing/2010/main" val="0"/>
-              </a:ext>
-            </a:extLst>
-          </a:blip>
-          <a:stretch>
-            <a:fillRect/>
-          </a:stretch>
-        </p:blipFill>
-        <p:spPr>
-          <a:xfrm>
-            <a:off x="4867275" y="2828925"/>
-            <a:ext cx="2457450" cy="1200150"/>
-          </a:xfrm>
-          <a:prstGeom prst="rect">
-            <a:avLst/>
-          </a:prstGeom>
-        </p:spPr>
-      </p:pic>
-    </p:spTree>
-    <p:extLst>
-      <p:ext uri="{BB962C8B-B14F-4D97-AF65-F5344CB8AC3E}">
-        <p14:creationId xmlns:p14="http://schemas.microsoft.com/office/powerpoint/2010/main" val="3076449738"/>
-      </p:ext>
-    </p:extLst>
-  </p:cSld>
-  <p:clrMapOvr>
-    <a:masterClrMapping/>
-  </p:clrMapOvr>
-</p:sld>
-</file>
-
-<file path=ppt/slides/slide60.xml><?xml version="1.0" encoding="utf-8"?>
+<file path=ppt/slides/slide63.xml><?xml version="1.0" encoding="utf-8"?>
 <p:sld xmlns:a="http://schemas.openxmlformats.org/drawingml/2006/main" xmlns:r="http://schemas.openxmlformats.org/officeDocument/2006/relationships" xmlns:p="http://schemas.openxmlformats.org/presentationml/2006/main">
   <p:cSld>
     <p:spTree>
@@ -11121,7 +11480,7 @@
 </p:sld>
 </file>
 
-<file path=ppt/slides/slide61.xml><?xml version="1.0" encoding="utf-8"?>
+<file path=ppt/slides/slide64.xml><?xml version="1.0" encoding="utf-8"?>
 <p:sld xmlns:a="http://schemas.openxmlformats.org/drawingml/2006/main" xmlns:r="http://schemas.openxmlformats.org/officeDocument/2006/relationships" xmlns:p="http://schemas.openxmlformats.org/presentationml/2006/main">
   <p:cSld>
     <p:spTree>
@@ -11275,7 +11634,7 @@
 </p:sld>
 </file>
 
-<file path=ppt/slides/slide62.xml><?xml version="1.0" encoding="utf-8"?>
+<file path=ppt/slides/slide65.xml><?xml version="1.0" encoding="utf-8"?>
 <p:sld xmlns:a="http://schemas.openxmlformats.org/drawingml/2006/main" xmlns:r="http://schemas.openxmlformats.org/officeDocument/2006/relationships" xmlns:p="http://schemas.openxmlformats.org/presentationml/2006/main">
   <p:cSld>
     <p:spTree>
@@ -11429,7 +11788,7 @@
 </p:sld>
 </file>
 
-<file path=ppt/slides/slide63.xml><?xml version="1.0" encoding="utf-8"?>
+<file path=ppt/slides/slide66.xml><?xml version="1.0" encoding="utf-8"?>
 <p:sld xmlns:a="http://schemas.openxmlformats.org/drawingml/2006/main" xmlns:r="http://schemas.openxmlformats.org/officeDocument/2006/relationships" xmlns:p="http://schemas.openxmlformats.org/presentationml/2006/main">
   <p:cSld>
     <p:spTree>
@@ -11583,7 +11942,7 @@
 </p:sld>
 </file>
 
-<file path=ppt/slides/slide64.xml><?xml version="1.0" encoding="utf-8"?>
+<file path=ppt/slides/slide67.xml><?xml version="1.0" encoding="utf-8"?>
 <p:sld xmlns:a="http://schemas.openxmlformats.org/drawingml/2006/main" xmlns:r="http://schemas.openxmlformats.org/officeDocument/2006/relationships" xmlns:p="http://schemas.openxmlformats.org/presentationml/2006/main">
   <p:cSld>
     <p:spTree>
